--- a/PPTs/Ch2_Data_Representation_Exercises ANS.pptx
+++ b/PPTs/Ch2_Data_Representation_Exercises ANS.pptx
@@ -308,7 +308,7 @@
             <a:fld id="{BD4F56A7-3CDE-194F-B9AF-D598FBBF1989}" type="datetimeFigureOut">
               <a:rPr lang="en-US" smtClean="0"/>
               <a:pPr/>
-              <a:t>2/10/2026</a:t>
+              <a:t>9/21/2026</a:t>
             </a:fld>
             <a:endParaRPr lang="en-US"/>
           </a:p>
@@ -476,7 +476,7 @@
             <a:fld id="{1E52AD58-60CE-E948-9CBA-0BD7030FC28E}" type="datetimeFigureOut">
               <a:rPr lang="en-US" smtClean="0"/>
               <a:pPr/>
-              <a:t>2/10/2026</a:t>
+              <a:t>9/21/2026</a:t>
             </a:fld>
             <a:endParaRPr lang="en-US"/>
           </a:p>
@@ -1722,7 +1722,7 @@
             <a:pPr eaLnBrk="1" latinLnBrk="0" hangingPunct="1"/>
             <a:fld id="{8E8B2B42-CBC2-7D4E-BA50-0E7F29B4DAAB}" type="datetime1">
               <a:rPr lang="en-US" smtClean="0"/>
-              <a:t>2/10/2026</a:t>
+              <a:t>9/21/2026</a:t>
             </a:fld>
             <a:endParaRPr lang="en-US" sz="1600" dirty="0"/>
           </a:p>
@@ -2082,7 +2082,7 @@
             <a:pPr eaLnBrk="1" latinLnBrk="0" hangingPunct="1"/>
             <a:fld id="{597D1259-3A46-254C-ADDB-B5DA4F1DF3DA}" type="datetime1">
               <a:rPr lang="en-US" smtClean="0"/>
-              <a:t>2/10/2026</a:t>
+              <a:t>9/21/2026</a:t>
             </a:fld>
             <a:endParaRPr lang="en-US"/>
           </a:p>
@@ -2258,7 +2258,7 @@
             <a:pPr eaLnBrk="1" latinLnBrk="0" hangingPunct="1"/>
             <a:fld id="{CCA104EC-54AA-E04F-BDC0-22B4E8892699}" type="datetime1">
               <a:rPr lang="en-US" smtClean="0"/>
-              <a:t>2/10/2026</a:t>
+              <a:t>9/21/2026</a:t>
             </a:fld>
             <a:endParaRPr lang="en-US"/>
           </a:p>
@@ -2494,7 +2494,7 @@
             <a:pPr eaLnBrk="1" latinLnBrk="0" hangingPunct="1"/>
             <a:fld id="{A9E6F060-20EB-3246-9088-08BF5F1271DE}" type="datetime1">
               <a:rPr lang="en-US" smtClean="0"/>
-              <a:t>2/10/2026</a:t>
+              <a:t>9/21/2026</a:t>
             </a:fld>
             <a:endParaRPr lang="en-US" dirty="0"/>
           </a:p>
@@ -2764,7 +2764,7 @@
             <a:pPr eaLnBrk="1" latinLnBrk="0" hangingPunct="1"/>
             <a:fld id="{34C82E41-DA7E-CA4C-823B-C759BEA16CE8}" type="datetime1">
               <a:rPr lang="en-US" smtClean="0"/>
-              <a:t>2/10/2026</a:t>
+              <a:t>9/21/2026</a:t>
             </a:fld>
             <a:endParaRPr lang="en-US" dirty="0"/>
           </a:p>
@@ -2985,7 +2985,7 @@
             <a:pPr eaLnBrk="1" latinLnBrk="0" hangingPunct="1"/>
             <a:fld id="{2500C8B0-EB1A-0A41-B839-C4B99CD2225A}" type="datetime1">
               <a:rPr lang="en-US" smtClean="0"/>
-              <a:t>2/10/2026</a:t>
+              <a:t>9/21/2026</a:t>
             </a:fld>
             <a:endParaRPr lang="en-US"/>
           </a:p>
@@ -3338,7 +3338,7 @@
             <a:pPr eaLnBrk="1" latinLnBrk="0" hangingPunct="1"/>
             <a:fld id="{4F16605B-D952-1149-A111-28A5633BAE48}" type="datetime1">
               <a:rPr lang="en-US" smtClean="0"/>
-              <a:t>2/10/2026</a:t>
+              <a:t>9/21/2026</a:t>
             </a:fld>
             <a:endParaRPr lang="en-US"/>
           </a:p>
@@ -3571,7 +3571,7 @@
             <a:pPr eaLnBrk="1" latinLnBrk="0" hangingPunct="1"/>
             <a:fld id="{91109A1C-29B2-B04E-8365-C9D22C4AE842}" type="datetime1">
               <a:rPr lang="en-US" smtClean="0"/>
-              <a:t>2/10/2026</a:t>
+              <a:t>9/21/2026</a:t>
             </a:fld>
             <a:endParaRPr lang="en-US"/>
           </a:p>
@@ -3713,7 +3713,7 @@
             <a:pPr eaLnBrk="1" latinLnBrk="0" hangingPunct="1"/>
             <a:fld id="{2CE417B6-A42B-064A-8677-46C55C4F613A}" type="datetime1">
               <a:rPr lang="en-US" smtClean="0"/>
-              <a:t>2/10/2026</a:t>
+              <a:t>9/21/2026</a:t>
             </a:fld>
             <a:endParaRPr lang="en-US"/>
           </a:p>
@@ -3991,7 +3991,7 @@
             <a:pPr eaLnBrk="1" latinLnBrk="0" hangingPunct="1"/>
             <a:fld id="{DE76F5AD-3F1F-7141-BC8A-012C5728BE2D}" type="datetime1">
               <a:rPr lang="en-US" smtClean="0"/>
-              <a:t>2/10/2026</a:t>
+              <a:t>9/21/2026</a:t>
             </a:fld>
             <a:endParaRPr lang="en-US"/>
           </a:p>
@@ -4399,7 +4399,7 @@
             <a:pPr eaLnBrk="1" latinLnBrk="0" hangingPunct="1"/>
             <a:fld id="{09FA12B8-739E-4D47-A14C-180C3BC10865}" type="datetime1">
               <a:rPr lang="en-US" smtClean="0"/>
-              <a:t>2/10/2026</a:t>
+              <a:t>9/21/2026</a:t>
             </a:fld>
             <a:endParaRPr lang="en-US"/>
           </a:p>
@@ -4737,7 +4737,7 @@
             <a:pPr eaLnBrk="1" latinLnBrk="0" hangingPunct="1"/>
             <a:fld id="{CDD18CD8-E404-844E-A4BD-DF69B8E5881E}" type="datetime1">
               <a:rPr lang="en-US" smtClean="0"/>
-              <a:t>2/10/2026</a:t>
+              <a:t>9/21/2026</a:t>
             </a:fld>
             <a:endParaRPr lang="en-US" sz="1400" dirty="0">
               <a:solidFill>
@@ -5561,7 +5561,7 @@
               <a:pPr defTabSz="342900">
                 <a:defRPr/>
               </a:pPr>
-              <a:t>2/10/2026</a:t>
+              <a:t>9/21/2026</a:t>
             </a:fld>
             <a:endParaRPr lang="en-US" sz="900">
               <a:solidFill>
@@ -6122,7 +6122,7 @@
               <a:pPr defTabSz="342900">
                 <a:defRPr/>
               </a:pPr>
-              <a:t>2/10/2026</a:t>
+              <a:t>9/21/2026</a:t>
             </a:fld>
             <a:endParaRPr lang="en-US" sz="900">
               <a:solidFill>
@@ -7145,7 +7145,7 @@
               <a:pPr defTabSz="342900">
                 <a:defRPr/>
               </a:pPr>
-              <a:t>2/10/2026</a:t>
+              <a:t>9/21/2026</a:t>
             </a:fld>
             <a:endParaRPr lang="en-US" sz="900">
               <a:solidFill>
@@ -7712,7 +7712,7 @@
               <a:pPr defTabSz="342900">
                 <a:defRPr/>
               </a:pPr>
-              <a:t>2/10/2026</a:t>
+              <a:t>9/21/2026</a:t>
             </a:fld>
             <a:endParaRPr lang="en-US" sz="900">
               <a:solidFill>
@@ -8959,7 +8959,7 @@
         <p:spPr/>
         <p:txBody>
           <a:bodyPr>
-            <a:normAutofit fontScale="92500"/>
+            <a:normAutofit fontScale="92500" lnSpcReduction="20000"/>
           </a:bodyPr>
           <a:lstStyle/>
           <a:p>
@@ -8991,7 +8991,19 @@
             </a:r>
             <a:r>
               <a:rPr lang="en-US" dirty="0"/>
-              <a:t>1011+0110 = 10001; the extra leftmost bit is discarded, so the result is 0001 (1 in decimal) for both cases. </a:t>
+              <a:t>1011+0110 = </a:t>
+            </a:r>
+            <a:r>
+              <a:rPr lang="en-US" dirty="0">
+                <a:solidFill>
+                  <a:srgbClr val="FF0000"/>
+                </a:solidFill>
+              </a:rPr>
+              <a:t>1</a:t>
+            </a:r>
+            <a:r>
+              <a:rPr lang="en-US" dirty="0"/>
+              <a:t>0001; the extra leftmost bit is discarded, so the result is 0001 (1 in decimal) for both cases. </a:t>
             </a:r>
           </a:p>
           <a:p>
@@ -9037,9 +9049,30 @@
           <a:p>
             <a:r>
               <a:rPr lang="en-US" altLang="zh-CN" dirty="0"/>
-              <a:t>For signed addition, true result should be -5+6=1 in decimal. So the result is correct.</a:t>
-            </a:r>
-            <a:endParaRPr lang="en-US" dirty="0"/>
+              <a:t>For signed addition, true result should be -5+6=1 in decimal. So the result is correct, and Borrow</a:t>
+            </a:r>
+            <a:r>
+              <a:rPr lang="en-US" dirty="0"/>
+              <a:t> flag is set to 0.</a:t>
+            </a:r>
+          </a:p>
+          <a:p>
+            <a:r>
+              <a:rPr lang="en-US" dirty="0"/>
+              <a:t>Throwing away the extra leftmost bit of </a:t>
+            </a:r>
+            <a:r>
+              <a:rPr lang="en-US" dirty="0">
+                <a:solidFill>
+                  <a:srgbClr val="FF0000"/>
+                </a:solidFill>
+              </a:rPr>
+              <a:t>1</a:t>
+            </a:r>
+            <a:r>
+              <a:rPr lang="en-US" dirty="0"/>
+              <a:t> makes result for unsigned addition wrong (Carry = 1), but keeps result for signed addition correct (Borrow = 0)</a:t>
+            </a:r>
           </a:p>
         </p:txBody>
       </p:sp>
@@ -9286,8 +9319,13 @@
           <a:p>
             <a:r>
               <a:rPr lang="en-US" altLang="zh-CN" dirty="0"/>
-              <a:t>For unsigned subtraction, true result should be 11-6=5 in decimal. So the result is correct</a:t>
-            </a:r>
+              <a:t>For unsigned subtraction, true result should be 11-6=5 in decimal. So the result is correct, </a:t>
+            </a:r>
+            <a:r>
+              <a:rPr lang="en-US" dirty="0"/>
+              <a:t>Borrow flag is set to 0.</a:t>
+            </a:r>
+            <a:endParaRPr lang="en-US" altLang="zh-CN" dirty="0"/>
           </a:p>
           <a:p>
             <a:r>
@@ -9672,8 +9710,21 @@
           <a:p>
             <a:r>
               <a:rPr lang="en-US" altLang="zh-CN" dirty="0"/>
-              <a:t>For unsigned subtraction, true result should be 6-11=-5 in decimal. Since -5 &lt; 0, the result is wrong, and Carry flag is 0 (Borrow flag is 1).</a:t>
-            </a:r>
+              <a:t>For unsigned subtraction, true result should be 6-11=-5 in decimal. Since -5 &lt; 0, the result is wrong, </a:t>
+            </a:r>
+            <a:r>
+              <a:rPr lang="en-US" altLang="zh-CN"/>
+              <a:t>and Borrow </a:t>
+            </a:r>
+            <a:r>
+              <a:rPr lang="en-US" altLang="zh-CN" dirty="0"/>
+              <a:t>flag </a:t>
+            </a:r>
+            <a:r>
+              <a:rPr lang="en-US" altLang="zh-CN"/>
+              <a:t>is 1.</a:t>
+            </a:r>
+            <a:endParaRPr lang="en-US" altLang="zh-CN" dirty="0"/>
           </a:p>
           <a:p>
             <a:r>
@@ -10179,7 +10230,7 @@
           <a:p>
             <a:r>
               <a:rPr lang="en-US" dirty="0"/>
-              <a:t>For each of the following binary numbers, give the corresponding binary number of the negative of its value, for 2’s-complement system</a:t>
+              <a:t>For each of the following binary numbers, give the corresponding binary number of its negation, for an 8-bit system, with 2’s-complement representation.</a:t>
             </a:r>
           </a:p>
           <a:p>
@@ -10271,7 +10322,7 @@
           <a:p>
             <a:r>
               <a:rPr lang="en-US" dirty="0"/>
-              <a:t>For each of the following binary numbers x, give the corresponding binary number of –x in 2’s-complement representation?</a:t>
+              <a:t>For each of the following binary numbers, give the corresponding binary number of its negation, for an 8-bit system, with 2’s-complement representation.</a:t>
             </a:r>
           </a:p>
           <a:p>
@@ -10303,7 +10354,7 @@
           <a:p>
             <a:r>
               <a:rPr lang="pt-BR" dirty="0"/>
-              <a:t>(c) x=10000000</a:t>
+              <a:t>(c) x= 10000000</a:t>
             </a:r>
           </a:p>
           <a:p>
@@ -10314,7 +10365,11 @@
             </a:r>
           </a:p>
           <a:p>
-            <a:endParaRPr lang="pt-BR" dirty="0"/>
+            <a:pPr lvl="1"/>
+            <a:r>
+              <a:rPr lang="pt-BR" dirty="0"/>
+              <a:t>In decimal, x and –x are both -128. Hypothetically, for 10-bit system, x=0010000000=128, its TC –x=1110000000=-128</a:t>
+            </a:r>
           </a:p>
           <a:p>
             <a:pPr lvl="1"/>

--- a/PPTs/Ch2_Data_Representation_Exercises ANS.pptx
+++ b/PPTs/Ch2_Data_Representation_Exercises ANS.pptx
@@ -5332,7 +5332,7 @@
           <a:p>
             <a:r>
               <a:rPr lang="en-US" dirty="0"/>
-              <a:t>Spring 2026</a:t>
+              <a:t>Fall 2026</a:t>
             </a:r>
           </a:p>
         </p:txBody>
@@ -9049,17 +9049,17 @@
           <a:p>
             <a:r>
               <a:rPr lang="en-US" altLang="zh-CN" dirty="0"/>
-              <a:t>For signed addition, true result should be -5+6=1 in decimal. So the result is correct, and Borrow</a:t>
+              <a:t>For signed addition, true result should be -5+6=1 in decimal. So the result is correct, and Overflow flag is set to 0</a:t>
             </a:r>
             <a:r>
               <a:rPr lang="en-US" dirty="0"/>
-              <a:t> flag is set to 0.</a:t>
+              <a:t>.</a:t>
             </a:r>
           </a:p>
           <a:p>
             <a:r>
               <a:rPr lang="en-US" dirty="0"/>
-              <a:t>Throwing away the extra leftmost bit of </a:t>
+              <a:t xml:space="preserve">Throwing away the extra leftmost bit of </a:t>
             </a:r>
             <a:r>
               <a:rPr lang="en-US" dirty="0">
@@ -9071,7 +9071,7 @@
             </a:r>
             <a:r>
               <a:rPr lang="en-US" dirty="0"/>
-              <a:t> makes result for unsigned addition wrong (Carry = 1), but keeps result for signed addition correct (Borrow = 0)</a:t>
+              <a:t xml:space="preserve"> makes result for unsigned addition wrong (Carry = 1), but keeps result for signed addition correct (Overflow = 0)</a:t>
             </a:r>
           </a:p>
         </p:txBody>
@@ -9170,11 +9170,11 @@
           <a:p>
             <a:r>
               <a:rPr lang="en-US" dirty="0"/>
-              <a:t>Q: Q: Consider a 4-bit system. What is the result of subtraction 1011-0110, assuming either unsigned integers, or signed integers</a:t>
+              <a:t>Q: Consider a 4-bit system. What is the result of subtraction 1011-0110, assuming either unsigned integers, or signed integers</a:t>
             </a:r>
             <a:r>
               <a:rPr lang="en-US" altLang="zh-CN" dirty="0"/>
-              <a:t> </a:t>
+              <a:t xml:space="preserve"> </a:t>
             </a:r>
             <a:r>
               <a:rPr lang="en-US" dirty="0"/>
@@ -9845,13 +9845,13 @@
           <a:p>
             <a:r>
               <a:rPr lang="en-US" dirty="0"/>
-              <a:t>1. Overflow is impossible when subtracting one unsigned number from another.</a:t>
+              <a:t>1. Borrow=1 is impossible when subtracting one unsigned number from another.</a:t>
             </a:r>
           </a:p>
           <a:p>
             <a:r>
               <a:rPr lang="en-US" dirty="0"/>
-              <a:t>2. Overflow is impossible when subtracting two signed operands of the same sign.</a:t>
+              <a:t>2. Overflow=1 is impossible when subtracting two signed operands of the same sign.</a:t>
             </a:r>
           </a:p>
           <a:p>
@@ -9863,7 +9863,7 @@
           <a:p>
             <a:r>
               <a:rPr lang="en-US" dirty="0"/>
-              <a:t>4. In 2’s complement, the absolute values of full-scale negative and full-scale positive are identical</a:t>
+              <a:t>4. In 2’s complement, the absolute values of smallest negative and largest positive numbers are identical.</a:t>
             </a:r>
           </a:p>
         </p:txBody>
@@ -11568,7 +11568,7 @@
           <a:p>
             <a:r>
               <a:rPr lang="en-US" dirty="0"/>
-              <a:t>Q: depends on the number system. </a:t>
+              <a:t xml:space="preserve">A: depends on the number system. </a:t>
             </a:r>
           </a:p>
           <a:p>
